--- a/plots/ae0/tef/tef.pptx
+++ b/plots/ae0/tef/tef.pptx
@@ -7,7 +7,11 @@
   <p:sldIdLst>
     <p:sldId id="256" r:id="rId2"/>
     <p:sldId id="258" r:id="rId3"/>
-    <p:sldId id="257" r:id="rId4"/>
+    <p:sldId id="259" r:id="rId4"/>
+    <p:sldId id="262" r:id="rId5"/>
+    <p:sldId id="261" r:id="rId6"/>
+    <p:sldId id="260" r:id="rId7"/>
+    <p:sldId id="257" r:id="rId8"/>
   </p:sldIdLst>
   <p:sldSz cx="12192000" cy="6858000"/>
   <p:notesSz cx="6858000" cy="9144000"/>
@@ -3330,10 +3334,10 @@
       </p:grpSpPr>
       <p:pic>
         <p:nvPicPr>
-          <p:cNvPr id="5" name="Picture 4">
-            <a:extLst>
-              <a:ext uri="{FF2B5EF4-FFF2-40B4-BE49-F238E27FC236}">
-                <a16:creationId xmlns:a16="http://schemas.microsoft.com/office/drawing/2014/main" id="{CB9CB753-CE7E-7E72-B142-AA610AFFF6BF}"/>
+          <p:cNvPr id="3" name="Picture 2">
+            <a:extLst>
+              <a:ext uri="{FF2B5EF4-FFF2-40B4-BE49-F238E27FC236}">
+                <a16:creationId xmlns:a16="http://schemas.microsoft.com/office/drawing/2014/main" id="{3A22F986-4D44-3509-D7E8-1C412DD03665}"/>
               </a:ext>
             </a:extLst>
           </p:cNvPr>
@@ -3350,14 +3354,15 @@
               </a:ext>
             </a:extLst>
           </a:blip>
+          <a:srcRect t="7367"/>
           <a:stretch>
             <a:fillRect/>
           </a:stretch>
         </p:blipFill>
         <p:spPr>
           <a:xfrm>
-            <a:off x="1040727" y="694125"/>
-            <a:ext cx="4834633" cy="2886017"/>
+            <a:off x="5874367" y="931648"/>
+            <a:ext cx="5133476" cy="2891633"/>
           </a:xfrm>
           <a:prstGeom prst="rect">
             <a:avLst/>
@@ -3366,10 +3371,10 @@
       </p:pic>
       <p:pic>
         <p:nvPicPr>
-          <p:cNvPr id="7" name="Picture 6">
-            <a:extLst>
-              <a:ext uri="{FF2B5EF4-FFF2-40B4-BE49-F238E27FC236}">
-                <a16:creationId xmlns:a16="http://schemas.microsoft.com/office/drawing/2014/main" id="{C71AECF8-6C61-25EC-2199-69D1FF0FB417}"/>
+          <p:cNvPr id="6" name="Picture 5">
+            <a:extLst>
+              <a:ext uri="{FF2B5EF4-FFF2-40B4-BE49-F238E27FC236}">
+                <a16:creationId xmlns:a16="http://schemas.microsoft.com/office/drawing/2014/main" id="{980E059C-6923-E42D-45DB-F6A47F22A0AB}"/>
               </a:ext>
             </a:extLst>
           </p:cNvPr>
@@ -3386,14 +3391,15 @@
               </a:ext>
             </a:extLst>
           </a:blip>
+          <a:srcRect t="6742"/>
           <a:stretch>
             <a:fillRect/>
           </a:stretch>
         </p:blipFill>
         <p:spPr>
           <a:xfrm>
-            <a:off x="1040727" y="3580142"/>
-            <a:ext cx="4834634" cy="2926226"/>
+            <a:off x="6178402" y="3823281"/>
+            <a:ext cx="4829441" cy="2891632"/>
           </a:xfrm>
           <a:prstGeom prst="rect">
             <a:avLst/>
@@ -3402,10 +3408,10 @@
       </p:pic>
       <p:pic>
         <p:nvPicPr>
-          <p:cNvPr id="9" name="Picture 8">
-            <a:extLst>
-              <a:ext uri="{FF2B5EF4-FFF2-40B4-BE49-F238E27FC236}">
-                <a16:creationId xmlns:a16="http://schemas.microsoft.com/office/drawing/2014/main" id="{2558E8BD-041A-C1D5-B18A-9EA92C7AB4FA}"/>
+          <p:cNvPr id="10" name="Picture 9">
+            <a:extLst>
+              <a:ext uri="{FF2B5EF4-FFF2-40B4-BE49-F238E27FC236}">
+                <a16:creationId xmlns:a16="http://schemas.microsoft.com/office/drawing/2014/main" id="{7DCB078F-E78F-A6DB-D3E4-13B07F22C30D}"/>
               </a:ext>
             </a:extLst>
           </p:cNvPr>
@@ -3428,8 +3434,8 @@
         </p:blipFill>
         <p:spPr>
           <a:xfrm>
-            <a:off x="5992805" y="3638865"/>
-            <a:ext cx="4580180" cy="2926226"/>
+            <a:off x="404364" y="1985998"/>
+            <a:ext cx="5157426" cy="3121600"/>
           </a:xfrm>
           <a:prstGeom prst="rect">
             <a:avLst/>
@@ -3474,10 +3480,10 @@
       </p:grpSpPr>
       <p:pic>
         <p:nvPicPr>
-          <p:cNvPr id="5" name="Picture 4">
-            <a:extLst>
-              <a:ext uri="{FF2B5EF4-FFF2-40B4-BE49-F238E27FC236}">
-                <a16:creationId xmlns:a16="http://schemas.microsoft.com/office/drawing/2014/main" id="{7E5A286A-8C38-4FF0-FD26-806313E02683}"/>
+          <p:cNvPr id="3" name="Picture 2">
+            <a:extLst>
+              <a:ext uri="{FF2B5EF4-FFF2-40B4-BE49-F238E27FC236}">
+                <a16:creationId xmlns:a16="http://schemas.microsoft.com/office/drawing/2014/main" id="{A8D3F664-0089-D64B-CBC9-B47FCCAAFDB1}"/>
               </a:ext>
             </a:extLst>
           </p:cNvPr>
@@ -3500,8 +3506,8 @@
         </p:blipFill>
         <p:spPr>
           <a:xfrm>
-            <a:off x="1088024" y="2155063"/>
-            <a:ext cx="4834633" cy="2886017"/>
+            <a:off x="503340" y="1992054"/>
+            <a:ext cx="4748169" cy="2873892"/>
           </a:xfrm>
           <a:prstGeom prst="rect">
             <a:avLst/>
@@ -3510,10 +3516,10 @@
       </p:pic>
       <p:pic>
         <p:nvPicPr>
-          <p:cNvPr id="7" name="Picture 6">
-            <a:extLst>
-              <a:ext uri="{FF2B5EF4-FFF2-40B4-BE49-F238E27FC236}">
-                <a16:creationId xmlns:a16="http://schemas.microsoft.com/office/drawing/2014/main" id="{EFF4BA9E-C01F-429E-BD02-ED85DE74E026}"/>
+          <p:cNvPr id="6" name="Picture 5">
+            <a:extLst>
+              <a:ext uri="{FF2B5EF4-FFF2-40B4-BE49-F238E27FC236}">
+                <a16:creationId xmlns:a16="http://schemas.microsoft.com/office/drawing/2014/main" id="{E466D8DD-E56F-4CBF-7E57-46BE815F9EBE}"/>
               </a:ext>
             </a:extLst>
           </p:cNvPr>
@@ -3530,14 +3536,52 @@
               </a:ext>
             </a:extLst>
           </a:blip>
+          <a:srcRect t="6961"/>
           <a:stretch>
             <a:fillRect/>
           </a:stretch>
         </p:blipFill>
         <p:spPr>
           <a:xfrm>
-            <a:off x="6017375" y="2114854"/>
-            <a:ext cx="4834634" cy="2926226"/>
+            <a:off x="5642995" y="3605169"/>
+            <a:ext cx="4748169" cy="2836278"/>
+          </a:xfrm>
+          <a:prstGeom prst="rect">
+            <a:avLst/>
+          </a:prstGeom>
+        </p:spPr>
+      </p:pic>
+      <p:pic>
+        <p:nvPicPr>
+          <p:cNvPr id="9" name="Picture 8">
+            <a:extLst>
+              <a:ext uri="{FF2B5EF4-FFF2-40B4-BE49-F238E27FC236}">
+                <a16:creationId xmlns:a16="http://schemas.microsoft.com/office/drawing/2014/main" id="{2A615072-ECEE-196A-8211-F27F02CFFCBB}"/>
+              </a:ext>
+            </a:extLst>
+          </p:cNvPr>
+          <p:cNvPicPr>
+            <a:picLocks noChangeAspect="1"/>
+          </p:cNvPicPr>
+          <p:nvPr/>
+        </p:nvPicPr>
+        <p:blipFill>
+          <a:blip r:embed="rId4">
+            <a:extLst>
+              <a:ext uri="{28A0092B-C50C-407E-A947-70E740481C1C}">
+                <a14:useLocalDpi xmlns:a14="http://schemas.microsoft.com/office/drawing/2010/main" val="0"/>
+              </a:ext>
+            </a:extLst>
+          </a:blip>
+          <a:srcRect t="7539"/>
+          <a:stretch>
+            <a:fillRect/>
+          </a:stretch>
+        </p:blipFill>
+        <p:spPr>
+          <a:xfrm>
+            <a:off x="5346619" y="636515"/>
+            <a:ext cx="5044545" cy="2836278"/>
           </a:xfrm>
           <a:prstGeom prst="rect">
             <a:avLst/>
@@ -3558,6 +3602,613 @@
 </file>
 
 <file path=ppt/slides/slide3.xml><?xml version="1.0" encoding="utf-8"?>
+<p:sld xmlns:a="http://schemas.openxmlformats.org/drawingml/2006/main" xmlns:r="http://schemas.openxmlformats.org/officeDocument/2006/relationships" xmlns:p="http://schemas.openxmlformats.org/presentationml/2006/main">
+  <p:cSld>
+    <p:spTree>
+      <p:nvGrpSpPr>
+        <p:cNvPr id="1" name=""/>
+        <p:cNvGrpSpPr/>
+        <p:nvPr/>
+      </p:nvGrpSpPr>
+      <p:grpSpPr>
+        <a:xfrm>
+          <a:off x="0" y="0"/>
+          <a:ext cx="0" cy="0"/>
+          <a:chOff x="0" y="0"/>
+          <a:chExt cx="0" cy="0"/>
+        </a:xfrm>
+      </p:grpSpPr>
+      <p:sp>
+        <p:nvSpPr>
+          <p:cNvPr id="4" name="TextBox 3">
+            <a:extLst>
+              <a:ext uri="{FF2B5EF4-FFF2-40B4-BE49-F238E27FC236}">
+                <a16:creationId xmlns:a16="http://schemas.microsoft.com/office/drawing/2014/main" id="{9132E3F9-F384-3E46-BD40-74B4321024AF}"/>
+              </a:ext>
+            </a:extLst>
+          </p:cNvPr>
+          <p:cNvSpPr txBox="1"/>
+          <p:nvPr/>
+        </p:nvSpPr>
+        <p:spPr>
+          <a:xfrm>
+            <a:off x="8034163" y="799888"/>
+            <a:ext cx="3749879" cy="369332"/>
+          </a:xfrm>
+          <a:prstGeom prst="rect">
+            <a:avLst/>
+          </a:prstGeom>
+          <a:noFill/>
+        </p:spPr>
+        <p:txBody>
+          <a:bodyPr wrap="square" rtlCol="0">
+            <a:spAutoFit/>
+          </a:bodyPr>
+          <a:lstStyle/>
+          <a:p>
+            <a:r>
+              <a:rPr lang="en-US" dirty="0"/>
+              <a:t>Spring tide</a:t>
+            </a:r>
+          </a:p>
+        </p:txBody>
+      </p:sp>
+      <p:pic>
+        <p:nvPicPr>
+          <p:cNvPr id="6" name="Picture 5">
+            <a:extLst>
+              <a:ext uri="{FF2B5EF4-FFF2-40B4-BE49-F238E27FC236}">
+                <a16:creationId xmlns:a16="http://schemas.microsoft.com/office/drawing/2014/main" id="{36661623-504D-45F6-E5BA-5F4E8B793270}"/>
+              </a:ext>
+            </a:extLst>
+          </p:cNvPr>
+          <p:cNvPicPr>
+            <a:picLocks noChangeAspect="1"/>
+          </p:cNvPicPr>
+          <p:nvPr/>
+        </p:nvPicPr>
+        <p:blipFill>
+          <a:blip r:embed="rId2"/>
+          <a:srcRect t="6332"/>
+          <a:stretch>
+            <a:fillRect/>
+          </a:stretch>
+        </p:blipFill>
+        <p:spPr>
+          <a:xfrm>
+            <a:off x="698615" y="3963265"/>
+            <a:ext cx="4756843" cy="2709422"/>
+          </a:xfrm>
+          <a:prstGeom prst="rect">
+            <a:avLst/>
+          </a:prstGeom>
+        </p:spPr>
+      </p:pic>
+      <p:sp>
+        <p:nvSpPr>
+          <p:cNvPr id="13" name="TextBox 12">
+            <a:extLst>
+              <a:ext uri="{FF2B5EF4-FFF2-40B4-BE49-F238E27FC236}">
+                <a16:creationId xmlns:a16="http://schemas.microsoft.com/office/drawing/2014/main" id="{F31008A9-C49D-9543-F16B-CAA644E2FFD7}"/>
+              </a:ext>
+            </a:extLst>
+          </p:cNvPr>
+          <p:cNvSpPr txBox="1"/>
+          <p:nvPr/>
+        </p:nvSpPr>
+        <p:spPr>
+          <a:xfrm>
+            <a:off x="2719431" y="799888"/>
+            <a:ext cx="3749879" cy="369332"/>
+          </a:xfrm>
+          <a:prstGeom prst="rect">
+            <a:avLst/>
+          </a:prstGeom>
+          <a:noFill/>
+        </p:spPr>
+        <p:txBody>
+          <a:bodyPr wrap="square" rtlCol="0">
+            <a:spAutoFit/>
+          </a:bodyPr>
+          <a:lstStyle/>
+          <a:p>
+            <a:r>
+              <a:rPr lang="en-US" dirty="0"/>
+              <a:t>Neap tide</a:t>
+            </a:r>
+          </a:p>
+        </p:txBody>
+      </p:sp>
+      <p:pic>
+        <p:nvPicPr>
+          <p:cNvPr id="23" name="Picture 22">
+            <a:extLst>
+              <a:ext uri="{FF2B5EF4-FFF2-40B4-BE49-F238E27FC236}">
+                <a16:creationId xmlns:a16="http://schemas.microsoft.com/office/drawing/2014/main" id="{CE3A1356-BA69-31F0-1696-DEB45AF4D2AE}"/>
+              </a:ext>
+            </a:extLst>
+          </p:cNvPr>
+          <p:cNvPicPr>
+            <a:picLocks noChangeAspect="1"/>
+          </p:cNvPicPr>
+          <p:nvPr/>
+        </p:nvPicPr>
+        <p:blipFill>
+          <a:blip r:embed="rId3"/>
+          <a:srcRect t="6614"/>
+          <a:stretch>
+            <a:fillRect/>
+          </a:stretch>
+        </p:blipFill>
+        <p:spPr>
+          <a:xfrm>
+            <a:off x="6171499" y="4004454"/>
+            <a:ext cx="4756843" cy="2701254"/>
+          </a:xfrm>
+          <a:prstGeom prst="rect">
+            <a:avLst/>
+          </a:prstGeom>
+        </p:spPr>
+      </p:pic>
+      <p:pic>
+        <p:nvPicPr>
+          <p:cNvPr id="27" name="Picture 26">
+            <a:extLst>
+              <a:ext uri="{FF2B5EF4-FFF2-40B4-BE49-F238E27FC236}">
+                <a16:creationId xmlns:a16="http://schemas.microsoft.com/office/drawing/2014/main" id="{F278AD4D-251D-2BA0-07C4-1425DCE7E490}"/>
+              </a:ext>
+            </a:extLst>
+          </p:cNvPr>
+          <p:cNvPicPr>
+            <a:picLocks noChangeAspect="1"/>
+          </p:cNvPicPr>
+          <p:nvPr/>
+        </p:nvPicPr>
+        <p:blipFill>
+          <a:blip r:embed="rId4"/>
+          <a:stretch>
+            <a:fillRect/>
+          </a:stretch>
+        </p:blipFill>
+        <p:spPr>
+          <a:xfrm>
+            <a:off x="698615" y="1128031"/>
+            <a:ext cx="4684298" cy="2835234"/>
+          </a:xfrm>
+          <a:prstGeom prst="rect">
+            <a:avLst/>
+          </a:prstGeom>
+        </p:spPr>
+      </p:pic>
+      <p:pic>
+        <p:nvPicPr>
+          <p:cNvPr id="31" name="Picture 30">
+            <a:extLst>
+              <a:ext uri="{FF2B5EF4-FFF2-40B4-BE49-F238E27FC236}">
+                <a16:creationId xmlns:a16="http://schemas.microsoft.com/office/drawing/2014/main" id="{3138BA41-5D0A-091F-FE15-9E0AED385E7D}"/>
+              </a:ext>
+            </a:extLst>
+          </p:cNvPr>
+          <p:cNvPicPr>
+            <a:picLocks noChangeAspect="1"/>
+          </p:cNvPicPr>
+          <p:nvPr/>
+        </p:nvPicPr>
+        <p:blipFill>
+          <a:blip r:embed="rId5"/>
+          <a:stretch>
+            <a:fillRect/>
+          </a:stretch>
+        </p:blipFill>
+        <p:spPr>
+          <a:xfrm>
+            <a:off x="6207771" y="1169220"/>
+            <a:ext cx="4684301" cy="2835234"/>
+          </a:xfrm>
+          <a:prstGeom prst="rect">
+            <a:avLst/>
+          </a:prstGeom>
+        </p:spPr>
+      </p:pic>
+    </p:spTree>
+    <p:extLst>
+      <p:ext uri="{BB962C8B-B14F-4D97-AF65-F5344CB8AC3E}">
+        <p14:creationId xmlns:p14="http://schemas.microsoft.com/office/powerpoint/2010/main" val="153127373"/>
+      </p:ext>
+    </p:extLst>
+  </p:cSld>
+  <p:clrMapOvr>
+    <a:masterClrMapping/>
+  </p:clrMapOvr>
+</p:sld>
+</file>
+
+<file path=ppt/slides/slide4.xml><?xml version="1.0" encoding="utf-8"?>
+<p:sld xmlns:a="http://schemas.openxmlformats.org/drawingml/2006/main" xmlns:r="http://schemas.openxmlformats.org/officeDocument/2006/relationships" xmlns:p="http://schemas.openxmlformats.org/presentationml/2006/main">
+  <p:cSld>
+    <p:spTree>
+      <p:nvGrpSpPr>
+        <p:cNvPr id="1" name="">
+          <a:extLst>
+            <a:ext uri="{FF2B5EF4-FFF2-40B4-BE49-F238E27FC236}">
+              <a16:creationId xmlns:a16="http://schemas.microsoft.com/office/drawing/2014/main" id="{D26DF213-BAB1-F6E4-0716-C7EA6BD7C7C3}"/>
+            </a:ext>
+          </a:extLst>
+        </p:cNvPr>
+        <p:cNvGrpSpPr/>
+        <p:nvPr/>
+      </p:nvGrpSpPr>
+      <p:grpSpPr>
+        <a:xfrm>
+          <a:off x="0" y="0"/>
+          <a:ext cx="0" cy="0"/>
+          <a:chOff x="0" y="0"/>
+          <a:chExt cx="0" cy="0"/>
+        </a:xfrm>
+      </p:grpSpPr>
+      <p:pic>
+        <p:nvPicPr>
+          <p:cNvPr id="6" name="Picture 5">
+            <a:extLst>
+              <a:ext uri="{FF2B5EF4-FFF2-40B4-BE49-F238E27FC236}">
+                <a16:creationId xmlns:a16="http://schemas.microsoft.com/office/drawing/2014/main" id="{CDA180EA-1E51-2F6D-F267-7009254585BB}"/>
+              </a:ext>
+            </a:extLst>
+          </p:cNvPr>
+          <p:cNvPicPr>
+            <a:picLocks noChangeAspect="1"/>
+          </p:cNvPicPr>
+          <p:nvPr/>
+        </p:nvPicPr>
+        <p:blipFill>
+          <a:blip r:embed="rId2"/>
+          <a:srcRect t="6332"/>
+          <a:stretch>
+            <a:fillRect/>
+          </a:stretch>
+        </p:blipFill>
+        <p:spPr>
+          <a:xfrm>
+            <a:off x="6013234" y="1227727"/>
+            <a:ext cx="4699975" cy="2677031"/>
+          </a:xfrm>
+          <a:prstGeom prst="rect">
+            <a:avLst/>
+          </a:prstGeom>
+        </p:spPr>
+      </p:pic>
+      <p:sp>
+        <p:nvSpPr>
+          <p:cNvPr id="13" name="TextBox 12">
+            <a:extLst>
+              <a:ext uri="{FF2B5EF4-FFF2-40B4-BE49-F238E27FC236}">
+                <a16:creationId xmlns:a16="http://schemas.microsoft.com/office/drawing/2014/main" id="{75254959-0B54-7F16-C5A7-D35D84F736CB}"/>
+              </a:ext>
+            </a:extLst>
+          </p:cNvPr>
+          <p:cNvSpPr txBox="1"/>
+          <p:nvPr/>
+        </p:nvSpPr>
+        <p:spPr>
+          <a:xfrm>
+            <a:off x="3054990" y="2117809"/>
+            <a:ext cx="3749879" cy="369332"/>
+          </a:xfrm>
+          <a:prstGeom prst="rect">
+            <a:avLst/>
+          </a:prstGeom>
+          <a:noFill/>
+        </p:spPr>
+        <p:txBody>
+          <a:bodyPr wrap="square" rtlCol="0">
+            <a:spAutoFit/>
+          </a:bodyPr>
+          <a:lstStyle/>
+          <a:p>
+            <a:r>
+              <a:rPr lang="en-US" dirty="0"/>
+              <a:t>Neap tide</a:t>
+            </a:r>
+          </a:p>
+        </p:txBody>
+      </p:sp>
+      <p:pic>
+        <p:nvPicPr>
+          <p:cNvPr id="27" name="Picture 26">
+            <a:extLst>
+              <a:ext uri="{FF2B5EF4-FFF2-40B4-BE49-F238E27FC236}">
+                <a16:creationId xmlns:a16="http://schemas.microsoft.com/office/drawing/2014/main" id="{0450AA6A-6168-A30D-92C0-B498FC479DCE}"/>
+              </a:ext>
+            </a:extLst>
+          </p:cNvPr>
+          <p:cNvPicPr>
+            <a:picLocks noChangeAspect="1"/>
+          </p:cNvPicPr>
+          <p:nvPr/>
+        </p:nvPicPr>
+        <p:blipFill>
+          <a:blip r:embed="rId3"/>
+          <a:stretch>
+            <a:fillRect/>
+          </a:stretch>
+        </p:blipFill>
+        <p:spPr>
+          <a:xfrm>
+            <a:off x="1109676" y="2487141"/>
+            <a:ext cx="4684298" cy="2835234"/>
+          </a:xfrm>
+          <a:prstGeom prst="rect">
+            <a:avLst/>
+          </a:prstGeom>
+        </p:spPr>
+      </p:pic>
+      <p:pic>
+        <p:nvPicPr>
+          <p:cNvPr id="3" name="Picture 2">
+            <a:extLst>
+              <a:ext uri="{FF2B5EF4-FFF2-40B4-BE49-F238E27FC236}">
+                <a16:creationId xmlns:a16="http://schemas.microsoft.com/office/drawing/2014/main" id="{7DD52BFC-30C6-2F96-5869-B4DD3D1BBAD9}"/>
+              </a:ext>
+            </a:extLst>
+          </p:cNvPr>
+          <p:cNvPicPr>
+            <a:picLocks noChangeAspect="1"/>
+          </p:cNvPicPr>
+          <p:nvPr/>
+        </p:nvPicPr>
+        <p:blipFill>
+          <a:blip r:embed="rId4"/>
+          <a:srcRect t="6583"/>
+          <a:stretch>
+            <a:fillRect/>
+          </a:stretch>
+        </p:blipFill>
+        <p:spPr>
+          <a:xfrm>
+            <a:off x="6249798" y="4098957"/>
+            <a:ext cx="4463411" cy="2677031"/>
+          </a:xfrm>
+          <a:prstGeom prst="rect">
+            <a:avLst/>
+          </a:prstGeom>
+        </p:spPr>
+      </p:pic>
+    </p:spTree>
+    <p:extLst>
+      <p:ext uri="{BB962C8B-B14F-4D97-AF65-F5344CB8AC3E}">
+        <p14:creationId xmlns:p14="http://schemas.microsoft.com/office/powerpoint/2010/main" val="1010827907"/>
+      </p:ext>
+    </p:extLst>
+  </p:cSld>
+  <p:clrMapOvr>
+    <a:masterClrMapping/>
+  </p:clrMapOvr>
+</p:sld>
+</file>
+
+<file path=ppt/slides/slide5.xml><?xml version="1.0" encoding="utf-8"?>
+<p:sld xmlns:a="http://schemas.openxmlformats.org/drawingml/2006/main" xmlns:r="http://schemas.openxmlformats.org/officeDocument/2006/relationships" xmlns:p="http://schemas.openxmlformats.org/presentationml/2006/main">
+  <p:cSld>
+    <p:spTree>
+      <p:nvGrpSpPr>
+        <p:cNvPr id="1" name="">
+          <a:extLst>
+            <a:ext uri="{FF2B5EF4-FFF2-40B4-BE49-F238E27FC236}">
+              <a16:creationId xmlns:a16="http://schemas.microsoft.com/office/drawing/2014/main" id="{923F4391-C2A1-5C20-0D43-BC89144091AE}"/>
+            </a:ext>
+          </a:extLst>
+        </p:cNvPr>
+        <p:cNvGrpSpPr/>
+        <p:nvPr/>
+      </p:nvGrpSpPr>
+      <p:grpSpPr>
+        <a:xfrm>
+          <a:off x="0" y="0"/>
+          <a:ext cx="0" cy="0"/>
+          <a:chOff x="0" y="0"/>
+          <a:chExt cx="0" cy="0"/>
+        </a:xfrm>
+      </p:grpSpPr>
+      <p:sp>
+        <p:nvSpPr>
+          <p:cNvPr id="4" name="TextBox 3">
+            <a:extLst>
+              <a:ext uri="{FF2B5EF4-FFF2-40B4-BE49-F238E27FC236}">
+                <a16:creationId xmlns:a16="http://schemas.microsoft.com/office/drawing/2014/main" id="{BB5E3B79-BC0F-8A11-F239-B5DC969755E7}"/>
+              </a:ext>
+            </a:extLst>
+          </p:cNvPr>
+          <p:cNvSpPr txBox="1"/>
+          <p:nvPr/>
+        </p:nvSpPr>
+        <p:spPr>
+          <a:xfrm>
+            <a:off x="2950435" y="1764622"/>
+            <a:ext cx="3749879" cy="369332"/>
+          </a:xfrm>
+          <a:prstGeom prst="rect">
+            <a:avLst/>
+          </a:prstGeom>
+          <a:noFill/>
+        </p:spPr>
+        <p:txBody>
+          <a:bodyPr wrap="square" rtlCol="0">
+            <a:spAutoFit/>
+          </a:bodyPr>
+          <a:lstStyle/>
+          <a:p>
+            <a:r>
+              <a:rPr lang="en-US" dirty="0"/>
+              <a:t>Spring tide</a:t>
+            </a:r>
+          </a:p>
+        </p:txBody>
+      </p:sp>
+      <p:pic>
+        <p:nvPicPr>
+          <p:cNvPr id="23" name="Picture 22">
+            <a:extLst>
+              <a:ext uri="{FF2B5EF4-FFF2-40B4-BE49-F238E27FC236}">
+                <a16:creationId xmlns:a16="http://schemas.microsoft.com/office/drawing/2014/main" id="{F2675BFD-A717-E45F-592E-3D48343F3355}"/>
+              </a:ext>
+            </a:extLst>
+          </p:cNvPr>
+          <p:cNvPicPr>
+            <a:picLocks noChangeAspect="1"/>
+          </p:cNvPicPr>
+          <p:nvPr/>
+        </p:nvPicPr>
+        <p:blipFill>
+          <a:blip r:embed="rId2"/>
+          <a:srcRect t="6614"/>
+          <a:stretch>
+            <a:fillRect/>
+          </a:stretch>
+        </p:blipFill>
+        <p:spPr>
+          <a:xfrm>
+            <a:off x="5760438" y="1052501"/>
+            <a:ext cx="4756843" cy="2701254"/>
+          </a:xfrm>
+          <a:prstGeom prst="rect">
+            <a:avLst/>
+          </a:prstGeom>
+        </p:spPr>
+      </p:pic>
+      <p:pic>
+        <p:nvPicPr>
+          <p:cNvPr id="31" name="Picture 30">
+            <a:extLst>
+              <a:ext uri="{FF2B5EF4-FFF2-40B4-BE49-F238E27FC236}">
+                <a16:creationId xmlns:a16="http://schemas.microsoft.com/office/drawing/2014/main" id="{A39EBF65-000D-5319-BEE7-B1B58B64C907}"/>
+              </a:ext>
+            </a:extLst>
+          </p:cNvPr>
+          <p:cNvPicPr>
+            <a:picLocks noChangeAspect="1"/>
+          </p:cNvPicPr>
+          <p:nvPr/>
+        </p:nvPicPr>
+        <p:blipFill>
+          <a:blip r:embed="rId3"/>
+          <a:stretch>
+            <a:fillRect/>
+          </a:stretch>
+        </p:blipFill>
+        <p:spPr>
+          <a:xfrm>
+            <a:off x="954419" y="2133954"/>
+            <a:ext cx="4684301" cy="2835234"/>
+          </a:xfrm>
+          <a:prstGeom prst="rect">
+            <a:avLst/>
+          </a:prstGeom>
+        </p:spPr>
+      </p:pic>
+      <p:pic>
+        <p:nvPicPr>
+          <p:cNvPr id="33" name="Picture 32">
+            <a:extLst>
+              <a:ext uri="{FF2B5EF4-FFF2-40B4-BE49-F238E27FC236}">
+                <a16:creationId xmlns:a16="http://schemas.microsoft.com/office/drawing/2014/main" id="{CF82BD4F-684F-7FC0-77DA-7C8728EB5AB9}"/>
+              </a:ext>
+            </a:extLst>
+          </p:cNvPr>
+          <p:cNvPicPr>
+            <a:picLocks noChangeAspect="1"/>
+          </p:cNvPicPr>
+          <p:nvPr/>
+        </p:nvPicPr>
+        <p:blipFill>
+          <a:blip r:embed="rId4"/>
+          <a:stretch>
+            <a:fillRect/>
+          </a:stretch>
+        </p:blipFill>
+        <p:spPr>
+          <a:xfrm>
+            <a:off x="6003873" y="3753755"/>
+            <a:ext cx="4513408" cy="2897771"/>
+          </a:xfrm>
+          <a:prstGeom prst="rect">
+            <a:avLst/>
+          </a:prstGeom>
+        </p:spPr>
+      </p:pic>
+    </p:spTree>
+    <p:extLst>
+      <p:ext uri="{BB962C8B-B14F-4D97-AF65-F5344CB8AC3E}">
+        <p14:creationId xmlns:p14="http://schemas.microsoft.com/office/powerpoint/2010/main" val="2465036352"/>
+      </p:ext>
+    </p:extLst>
+  </p:cSld>
+  <p:clrMapOvr>
+    <a:masterClrMapping/>
+  </p:clrMapOvr>
+</p:sld>
+</file>
+
+<file path=ppt/slides/slide6.xml><?xml version="1.0" encoding="utf-8"?>
+<p:sld xmlns:a="http://schemas.openxmlformats.org/drawingml/2006/main" xmlns:r="http://schemas.openxmlformats.org/officeDocument/2006/relationships" xmlns:p="http://schemas.openxmlformats.org/presentationml/2006/main">
+  <p:cSld>
+    <p:spTree>
+      <p:nvGrpSpPr>
+        <p:cNvPr id="1" name=""/>
+        <p:cNvGrpSpPr/>
+        <p:nvPr/>
+      </p:nvGrpSpPr>
+      <p:grpSpPr>
+        <a:xfrm>
+          <a:off x="0" y="0"/>
+          <a:ext cx="0" cy="0"/>
+          <a:chOff x="0" y="0"/>
+          <a:chExt cx="0" cy="0"/>
+        </a:xfrm>
+      </p:grpSpPr>
+      <p:pic>
+        <p:nvPicPr>
+          <p:cNvPr id="15" name="Picture 14">
+            <a:extLst>
+              <a:ext uri="{FF2B5EF4-FFF2-40B4-BE49-F238E27FC236}">
+                <a16:creationId xmlns:a16="http://schemas.microsoft.com/office/drawing/2014/main" id="{ACD0C203-9844-7AB1-A78D-4AAAD02A7CD8}"/>
+              </a:ext>
+            </a:extLst>
+          </p:cNvPr>
+          <p:cNvPicPr>
+            <a:picLocks noChangeAspect="1"/>
+          </p:cNvPicPr>
+          <p:nvPr/>
+        </p:nvPicPr>
+        <p:blipFill>
+          <a:blip r:embed="rId2"/>
+          <a:stretch>
+            <a:fillRect/>
+          </a:stretch>
+        </p:blipFill>
+        <p:spPr>
+          <a:xfrm>
+            <a:off x="602457" y="1691314"/>
+            <a:ext cx="5050785" cy="3071317"/>
+          </a:xfrm>
+          <a:prstGeom prst="rect">
+            <a:avLst/>
+          </a:prstGeom>
+        </p:spPr>
+      </p:pic>
+    </p:spTree>
+    <p:extLst>
+      <p:ext uri="{BB962C8B-B14F-4D97-AF65-F5344CB8AC3E}">
+        <p14:creationId xmlns:p14="http://schemas.microsoft.com/office/powerpoint/2010/main" val="3821139720"/>
+      </p:ext>
+    </p:extLst>
+  </p:cSld>
+  <p:clrMapOvr>
+    <a:masterClrMapping/>
+  </p:clrMapOvr>
+</p:sld>
+</file>
+
+<file path=ppt/slides/slide7.xml><?xml version="1.0" encoding="utf-8"?>
 <p:sld xmlns:a="http://schemas.openxmlformats.org/drawingml/2006/main" xmlns:r="http://schemas.openxmlformats.org/officeDocument/2006/relationships" xmlns:p="http://schemas.openxmlformats.org/presentationml/2006/main">
   <p:cSld>
     <p:spTree>
